--- a/Engenharia de Software/04 Ciclo de Vida de Software.pptx
+++ b/Engenharia de Software/04 Ciclo de Vida de Software.pptx
@@ -141,6 +141,11 @@
       </a:defRPr>
     </a:lvl9pPr>
   </p:defaultTextStyle>
+  <p:extLst>
+    <p:ext uri="{EFAFB233-063F-42B5-8137-9DF3F51BA10A}">
+      <p15:sldGuideLst xmlns:p15="http://schemas.microsoft.com/office/powerpoint/2012/main"/>
+    </p:ext>
+  </p:extLst>
 </p:presentation>
 </file>
 
@@ -898,6 +903,13 @@
             <a:schemeClr val="lt1"/>
           </a:fontRef>
         </p:style>
+        <p:txBody>
+          <a:bodyPr/>
+          <a:lstStyle/>
+          <a:p>
+            <a:endParaRPr lang="pt-BR"/>
+          </a:p>
+        </p:txBody>
       </p:sp>
       <p:sp>
         <p:nvSpPr>
@@ -936,6 +948,13 @@
             <a:schemeClr val="lt1"/>
           </a:fontRef>
         </p:style>
+        <p:txBody>
+          <a:bodyPr/>
+          <a:lstStyle/>
+          <a:p>
+            <a:endParaRPr lang="pt-BR"/>
+          </a:p>
+        </p:txBody>
       </p:sp>
       <p:sp>
         <p:nvSpPr>
@@ -3841,6 +3860,13 @@
             <a:schemeClr val="lt1"/>
           </a:fontRef>
         </p:style>
+        <p:txBody>
+          <a:bodyPr/>
+          <a:lstStyle/>
+          <a:p>
+            <a:endParaRPr lang="pt-BR"/>
+          </a:p>
+        </p:txBody>
       </p:sp>
       <p:sp>
         <p:nvSpPr>
@@ -3879,6 +3905,13 @@
             <a:schemeClr val="lt1"/>
           </a:fontRef>
         </p:style>
+        <p:txBody>
+          <a:bodyPr/>
+          <a:lstStyle/>
+          <a:p>
+            <a:endParaRPr lang="pt-BR"/>
+          </a:p>
+        </p:txBody>
       </p:sp>
       <p:sp>
         <p:nvSpPr>
@@ -4187,7 +4220,7 @@
         <a:buSzPct val="100000"/>
         <a:buFont typeface="Calibri" panose="020F0502020204030204" pitchFamily="34" charset="0"/>
         <a:buChar char=" "/>
-        <a:defRPr sz="2000" kern="1200">
+        <a:defRPr sz="2800" kern="1200">
           <a:solidFill>
             <a:schemeClr val="tx1">
               <a:lumMod val="75000"/>
@@ -4214,7 +4247,7 @@
         </a:buClr>
         <a:buFont typeface="Calibri" pitchFamily="34" charset="0"/>
         <a:buChar char="◦"/>
-        <a:defRPr sz="1800" kern="1200">
+        <a:defRPr sz="2400" kern="1200">
           <a:solidFill>
             <a:schemeClr val="tx1">
               <a:lumMod val="75000"/>
@@ -4241,7 +4274,7 @@
         </a:buClr>
         <a:buFont typeface="Calibri" pitchFamily="34" charset="0"/>
         <a:buChar char="◦"/>
-        <a:defRPr sz="1400" kern="1200">
+        <a:defRPr sz="1800" kern="1200">
           <a:solidFill>
             <a:schemeClr val="tx1">
               <a:lumMod val="75000"/>
@@ -4268,7 +4301,7 @@
         </a:buClr>
         <a:buFont typeface="Calibri" pitchFamily="34" charset="0"/>
         <a:buChar char="◦"/>
-        <a:defRPr sz="1400" kern="1200">
+        <a:defRPr sz="1800" kern="1200">
           <a:solidFill>
             <a:schemeClr val="tx1">
               <a:lumMod val="75000"/>
@@ -4295,7 +4328,7 @@
         </a:buClr>
         <a:buFont typeface="Calibri" pitchFamily="34" charset="0"/>
         <a:buChar char="◦"/>
-        <a:defRPr sz="1400" kern="1200">
+        <a:defRPr sz="1800" kern="1200">
           <a:solidFill>
             <a:schemeClr val="tx1">
               <a:lumMod val="75000"/>
@@ -4664,7 +4697,7 @@
         <p:spPr/>
         <p:txBody>
           <a:bodyPr>
-            <a:normAutofit/>
+            <a:normAutofit fontScale="92500" lnSpcReduction="20000"/>
           </a:bodyPr>
           <a:lstStyle/>
           <a:p>
@@ -5505,7 +5538,7 @@
         <p:spPr/>
         <p:txBody>
           <a:bodyPr>
-            <a:normAutofit fontScale="92500" lnSpcReduction="20000"/>
+            <a:normAutofit fontScale="70000" lnSpcReduction="20000"/>
           </a:bodyPr>
           <a:lstStyle/>
           <a:p>
@@ -5690,7 +5723,7 @@
         <p:spPr/>
         <p:txBody>
           <a:bodyPr>
-            <a:normAutofit lnSpcReduction="10000"/>
+            <a:normAutofit fontScale="85000" lnSpcReduction="20000"/>
           </a:bodyPr>
           <a:lstStyle/>
           <a:p>
@@ -5884,7 +5917,7 @@
         <p:spPr/>
         <p:txBody>
           <a:bodyPr>
-            <a:normAutofit/>
+            <a:normAutofit lnSpcReduction="10000"/>
           </a:bodyPr>
           <a:lstStyle/>
           <a:p>
@@ -6041,7 +6074,7 @@
         <p:spPr/>
         <p:txBody>
           <a:bodyPr>
-            <a:normAutofit/>
+            <a:normAutofit fontScale="92500" lnSpcReduction="20000"/>
           </a:bodyPr>
           <a:lstStyle/>
           <a:p>
@@ -6214,7 +6247,7 @@
         <p:spPr/>
         <p:txBody>
           <a:bodyPr>
-            <a:normAutofit/>
+            <a:normAutofit fontScale="92500"/>
           </a:bodyPr>
           <a:lstStyle/>
           <a:p>
@@ -6473,7 +6506,7 @@
         <p:spPr/>
         <p:txBody>
           <a:bodyPr>
-            <a:normAutofit lnSpcReduction="10000"/>
+            <a:normAutofit fontScale="92500" lnSpcReduction="20000"/>
           </a:bodyPr>
           <a:lstStyle/>
           <a:p>
@@ -7364,7 +7397,7 @@
         <p:spPr/>
         <p:txBody>
           <a:bodyPr>
-            <a:normAutofit/>
+            <a:normAutofit fontScale="92500" lnSpcReduction="20000"/>
           </a:bodyPr>
           <a:lstStyle/>
           <a:p>
@@ -7656,7 +7689,7 @@
         <p:spPr/>
         <p:txBody>
           <a:bodyPr>
-            <a:normAutofit lnSpcReduction="10000"/>
+            <a:normAutofit fontScale="85000" lnSpcReduction="20000"/>
           </a:bodyPr>
           <a:lstStyle/>
           <a:p>
@@ -8079,7 +8112,7 @@
         <p:spPr/>
         <p:txBody>
           <a:bodyPr>
-            <a:normAutofit/>
+            <a:normAutofit lnSpcReduction="10000"/>
           </a:bodyPr>
           <a:lstStyle/>
           <a:p>
@@ -8406,7 +8439,7 @@
         <p:spPr/>
         <p:txBody>
           <a:bodyPr>
-            <a:normAutofit/>
+            <a:normAutofit lnSpcReduction="10000"/>
           </a:bodyPr>
           <a:lstStyle/>
           <a:p>
@@ -8696,7 +8729,7 @@
         <p:spPr/>
         <p:txBody>
           <a:bodyPr>
-            <a:normAutofit/>
+            <a:normAutofit fontScale="92500" lnSpcReduction="20000"/>
           </a:bodyPr>
           <a:lstStyle/>
           <a:p>
@@ -8855,7 +8888,7 @@
         <p:spPr/>
         <p:txBody>
           <a:bodyPr>
-            <a:normAutofit/>
+            <a:normAutofit fontScale="77500" lnSpcReduction="20000"/>
           </a:bodyPr>
           <a:lstStyle/>
           <a:p>
@@ -9039,7 +9072,7 @@
         <p:spPr/>
         <p:txBody>
           <a:bodyPr>
-            <a:normAutofit/>
+            <a:normAutofit lnSpcReduction="10000"/>
           </a:bodyPr>
           <a:lstStyle/>
           <a:p>
@@ -9616,7 +9649,7 @@
         <p:spPr/>
         <p:txBody>
           <a:bodyPr>
-            <a:normAutofit fontScale="92500" lnSpcReduction="10000"/>
+            <a:normAutofit fontScale="77500" lnSpcReduction="20000"/>
           </a:bodyPr>
           <a:lstStyle/>
           <a:p>
